--- a/docs/pptx/whole/ritu-linsubhr-disc-death.pptx
+++ b/docs/pptx/whole/ritu-linsubhr-disc-death.pptx
@@ -2443,7 +2443,7 @@
           </p:nvSpPr>
           <p:spPr>
             <a:xfrm>
-              <a:off x="1942521" y="2073503"/>
+              <a:off x="1943067" y="2073503"/>
               <a:ext cx="0" cy="3649639"/>
             </a:xfrm>
             <a:custGeom>
@@ -2486,7 +2486,7 @@
           </p:nvSpPr>
           <p:spPr>
             <a:xfrm>
-              <a:off x="4460699" y="2073503"/>
+              <a:off x="4460487" y="2073503"/>
               <a:ext cx="0" cy="3649639"/>
             </a:xfrm>
             <a:custGeom>
@@ -2529,7 +2529,7 @@
           </p:nvSpPr>
           <p:spPr>
             <a:xfrm>
-              <a:off x="6978877" y="2073503"/>
+              <a:off x="6977907" y="2073503"/>
               <a:ext cx="0" cy="3649639"/>
             </a:xfrm>
             <a:custGeom>
@@ -2787,7 +2787,7 @@
           </p:nvSpPr>
           <p:spPr>
             <a:xfrm>
-              <a:off x="3201610" y="2073503"/>
+              <a:off x="3201777" y="2073503"/>
               <a:ext cx="0" cy="3649639"/>
             </a:xfrm>
             <a:custGeom>
@@ -2830,7 +2830,7 @@
           </p:nvSpPr>
           <p:spPr>
             <a:xfrm>
-              <a:off x="5719788" y="2073503"/>
+              <a:off x="5719197" y="2073503"/>
               <a:ext cx="0" cy="3649639"/>
             </a:xfrm>
             <a:custGeom>
@@ -2873,7 +2873,7 @@
           </p:nvSpPr>
           <p:spPr>
             <a:xfrm>
-              <a:off x="8237966" y="2073503"/>
+              <a:off x="8236616" y="2073503"/>
               <a:ext cx="0" cy="3649639"/>
             </a:xfrm>
             <a:custGeom>
@@ -3062,6 +3062,54 @@
                     <a:pt x="3223013" y="0"/>
                   </a:lnTo>
                   <a:lnTo>
+                    <a:pt x="3294636" y="0"/>
+                  </a:lnTo>
+                  <a:lnTo>
+                    <a:pt x="3366258" y="0"/>
+                  </a:lnTo>
+                  <a:lnTo>
+                    <a:pt x="3437881" y="0"/>
+                  </a:lnTo>
+                  <a:lnTo>
+                    <a:pt x="3509503" y="0"/>
+                  </a:lnTo>
+                  <a:lnTo>
+                    <a:pt x="3581126" y="0"/>
+                  </a:lnTo>
+                  <a:lnTo>
+                    <a:pt x="3652748" y="0"/>
+                  </a:lnTo>
+                  <a:lnTo>
+                    <a:pt x="3724371" y="0"/>
+                  </a:lnTo>
+                  <a:lnTo>
+                    <a:pt x="3795993" y="0"/>
+                  </a:lnTo>
+                  <a:lnTo>
+                    <a:pt x="5443311" y="0"/>
+                  </a:lnTo>
+                  <a:lnTo>
+                    <a:pt x="5514934" y="0"/>
+                  </a:lnTo>
+                  <a:lnTo>
+                    <a:pt x="5586557" y="0"/>
+                  </a:lnTo>
+                  <a:lnTo>
+                    <a:pt x="5658179" y="0"/>
+                  </a:lnTo>
+                  <a:lnTo>
+                    <a:pt x="5729802" y="0"/>
+                  </a:lnTo>
+                  <a:lnTo>
+                    <a:pt x="5801424" y="0"/>
+                  </a:lnTo>
+                  <a:lnTo>
+                    <a:pt x="5873047" y="0"/>
+                  </a:lnTo>
+                  <a:lnTo>
+                    <a:pt x="5944669" y="0"/>
+                  </a:lnTo>
+                  <a:lnTo>
                     <a:pt x="6016292" y="0"/>
                   </a:lnTo>
                   <a:lnTo>
@@ -3434,12 +3482,12 @@
           <p:spPr>
             <a:xfrm>
               <a:off x="1172049" y="2073503"/>
-              <a:ext cx="3223013" cy="0"/>
+              <a:ext cx="3795993" cy="0"/>
             </a:xfrm>
             <a:custGeom>
               <a:avLst/>
               <a:pathLst>
-                <a:path w="3223013" h="0">
+                <a:path w="3795993" h="0">
                   <a:moveTo>
                     <a:pt x="0" y="0"/>
                   </a:moveTo>
@@ -3577,6 +3625,30 @@
                   </a:lnTo>
                   <a:lnTo>
                     <a:pt x="3223013" y="0"/>
+                  </a:lnTo>
+                  <a:lnTo>
+                    <a:pt x="3294636" y="0"/>
+                  </a:lnTo>
+                  <a:lnTo>
+                    <a:pt x="3366258" y="0"/>
+                  </a:lnTo>
+                  <a:lnTo>
+                    <a:pt x="3437881" y="0"/>
+                  </a:lnTo>
+                  <a:lnTo>
+                    <a:pt x="3509503" y="0"/>
+                  </a:lnTo>
+                  <a:lnTo>
+                    <a:pt x="3581126" y="0"/>
+                  </a:lnTo>
+                  <a:lnTo>
+                    <a:pt x="3652748" y="0"/>
+                  </a:lnTo>
+                  <a:lnTo>
+                    <a:pt x="3724371" y="0"/>
+                  </a:lnTo>
+                  <a:lnTo>
+                    <a:pt x="3795993" y="0"/>
                   </a:lnTo>
                 </a:path>
               </a:pathLst>
@@ -3596,17 +3668,20 @@
           </p:nvSpPr>
           <p:spPr>
             <a:xfrm>
-              <a:off x="7188341" y="2073503"/>
-              <a:ext cx="1074337" cy="0"/>
+              <a:off x="6615361" y="2073503"/>
+              <a:ext cx="1647318" cy="0"/>
             </a:xfrm>
             <a:custGeom>
               <a:avLst/>
               <a:pathLst>
-                <a:path w="1074337" h="0">
+                <a:path w="1647318" h="0">
                   <a:moveTo>
                     <a:pt x="0" y="0"/>
                   </a:moveTo>
                   <a:lnTo>
+                    <a:pt x="0" y="0"/>
+                  </a:lnTo>
+                  <a:lnTo>
                     <a:pt x="71622" y="0"/>
                   </a:lnTo>
                   <a:lnTo>
@@ -3650,6 +3725,30 @@
                   </a:lnTo>
                   <a:lnTo>
                     <a:pt x="1074337" y="0"/>
+                  </a:lnTo>
+                  <a:lnTo>
+                    <a:pt x="1145960" y="0"/>
+                  </a:lnTo>
+                  <a:lnTo>
+                    <a:pt x="1217582" y="0"/>
+                  </a:lnTo>
+                  <a:lnTo>
+                    <a:pt x="1289205" y="0"/>
+                  </a:lnTo>
+                  <a:lnTo>
+                    <a:pt x="1360827" y="0"/>
+                  </a:lnTo>
+                  <a:lnTo>
+                    <a:pt x="1432450" y="0"/>
+                  </a:lnTo>
+                  <a:lnTo>
+                    <a:pt x="1504073" y="0"/>
+                  </a:lnTo>
+                  <a:lnTo>
+                    <a:pt x="1575695" y="0"/>
+                  </a:lnTo>
+                  <a:lnTo>
+                    <a:pt x="1647318" y="0"/>
                   </a:lnTo>
                 </a:path>
               </a:pathLst>
@@ -3994,141 +4093,141 @@
           </p:nvSpPr>
           <p:spPr>
             <a:xfrm>
-              <a:off x="5285849" y="2073503"/>
-              <a:ext cx="2976830" cy="3483075"/>
+              <a:off x="5324326" y="2073503"/>
+              <a:ext cx="2938353" cy="3483313"/>
             </a:xfrm>
             <a:custGeom>
               <a:avLst/>
               <a:pathLst>
-                <a:path w="2976830" h="3483075">
+                <a:path w="2938353" h="3483313">
                   <a:moveTo>
                     <a:pt x="0" y="0"/>
                   </a:moveTo>
                   <a:lnTo>
-                    <a:pt x="40306" y="396720"/>
-                  </a:lnTo>
-                  <a:lnTo>
-                    <a:pt x="111929" y="970614"/>
-                  </a:lnTo>
-                  <a:lnTo>
-                    <a:pt x="183551" y="1437817"/>
-                  </a:lnTo>
-                  <a:lnTo>
-                    <a:pt x="255174" y="1818166"/>
-                  </a:lnTo>
-                  <a:lnTo>
-                    <a:pt x="326796" y="2127805"/>
-                  </a:lnTo>
-                  <a:lnTo>
-                    <a:pt x="398419" y="2379882"/>
-                  </a:lnTo>
-                  <a:lnTo>
-                    <a:pt x="470041" y="2585096"/>
-                  </a:lnTo>
-                  <a:lnTo>
-                    <a:pt x="541664" y="2752159"/>
-                  </a:lnTo>
-                  <a:lnTo>
-                    <a:pt x="613286" y="2888165"/>
-                  </a:lnTo>
-                  <a:lnTo>
-                    <a:pt x="684909" y="2998886"/>
-                  </a:lnTo>
-                  <a:lnTo>
-                    <a:pt x="756532" y="3089024"/>
-                  </a:lnTo>
-                  <a:lnTo>
-                    <a:pt x="828154" y="3162405"/>
-                  </a:lnTo>
-                  <a:lnTo>
-                    <a:pt x="899777" y="3222144"/>
-                  </a:lnTo>
-                  <a:lnTo>
-                    <a:pt x="971399" y="3270777"/>
-                  </a:lnTo>
-                  <a:lnTo>
-                    <a:pt x="1043022" y="3310369"/>
-                  </a:lnTo>
-                  <a:lnTo>
-                    <a:pt x="1114644" y="3342601"/>
-                  </a:lnTo>
-                  <a:lnTo>
-                    <a:pt x="1186267" y="3368841"/>
-                  </a:lnTo>
-                  <a:lnTo>
-                    <a:pt x="1257889" y="3390202"/>
-                  </a:lnTo>
-                  <a:lnTo>
-                    <a:pt x="1329512" y="3407592"/>
-                  </a:lnTo>
-                  <a:lnTo>
-                    <a:pt x="1401134" y="3421750"/>
-                  </a:lnTo>
-                  <a:lnTo>
-                    <a:pt x="1472757" y="3433275"/>
-                  </a:lnTo>
-                  <a:lnTo>
-                    <a:pt x="1544379" y="3442658"/>
-                  </a:lnTo>
-                  <a:lnTo>
-                    <a:pt x="1616002" y="3450297"/>
-                  </a:lnTo>
-                  <a:lnTo>
-                    <a:pt x="1687624" y="3456515"/>
-                  </a:lnTo>
-                  <a:lnTo>
-                    <a:pt x="1759247" y="3461578"/>
-                  </a:lnTo>
-                  <a:lnTo>
-                    <a:pt x="1830869" y="3465699"/>
-                  </a:lnTo>
-                  <a:lnTo>
-                    <a:pt x="1902492" y="3469054"/>
-                  </a:lnTo>
-                  <a:lnTo>
-                    <a:pt x="1974114" y="3471785"/>
-                  </a:lnTo>
-                  <a:lnTo>
-                    <a:pt x="2045737" y="3474009"/>
-                  </a:lnTo>
-                  <a:lnTo>
-                    <a:pt x="2117360" y="3475819"/>
-                  </a:lnTo>
-                  <a:lnTo>
-                    <a:pt x="2188982" y="3477293"/>
-                  </a:lnTo>
-                  <a:lnTo>
-                    <a:pt x="2260605" y="3478493"/>
-                  </a:lnTo>
-                  <a:lnTo>
-                    <a:pt x="2332227" y="3479469"/>
-                  </a:lnTo>
-                  <a:lnTo>
-                    <a:pt x="2403850" y="3480264"/>
-                  </a:lnTo>
-                  <a:lnTo>
-                    <a:pt x="2475472" y="3480912"/>
-                  </a:lnTo>
-                  <a:lnTo>
-                    <a:pt x="2547095" y="3481439"/>
-                  </a:lnTo>
-                  <a:lnTo>
-                    <a:pt x="2618717" y="3481868"/>
-                  </a:lnTo>
-                  <a:lnTo>
-                    <a:pt x="2690340" y="3482217"/>
-                  </a:lnTo>
-                  <a:lnTo>
-                    <a:pt x="2761962" y="3482501"/>
-                  </a:lnTo>
-                  <a:lnTo>
-                    <a:pt x="2833585" y="3482733"/>
-                  </a:lnTo>
-                  <a:lnTo>
-                    <a:pt x="2905207" y="3482921"/>
-                  </a:lnTo>
-                  <a:lnTo>
-                    <a:pt x="2976830" y="3483075"/>
+                    <a:pt x="1829" y="21667"/>
+                  </a:lnTo>
+                  <a:lnTo>
+                    <a:pt x="73452" y="703002"/>
+                  </a:lnTo>
+                  <a:lnTo>
+                    <a:pt x="145074" y="1250250"/>
+                  </a:lnTo>
+                  <a:lnTo>
+                    <a:pt x="216697" y="1689800"/>
+                  </a:lnTo>
+                  <a:lnTo>
+                    <a:pt x="288319" y="2042847"/>
+                  </a:lnTo>
+                  <a:lnTo>
+                    <a:pt x="359942" y="2326415"/>
+                  </a:lnTo>
+                  <a:lnTo>
+                    <a:pt x="431564" y="2554177"/>
+                  </a:lnTo>
+                  <a:lnTo>
+                    <a:pt x="503187" y="2737115"/>
+                  </a:lnTo>
+                  <a:lnTo>
+                    <a:pt x="574809" y="2884052"/>
+                  </a:lnTo>
+                  <a:lnTo>
+                    <a:pt x="646432" y="3002071"/>
+                  </a:lnTo>
+                  <a:lnTo>
+                    <a:pt x="718054" y="3096864"/>
+                  </a:lnTo>
+                  <a:lnTo>
+                    <a:pt x="789677" y="3173002"/>
+                  </a:lnTo>
+                  <a:lnTo>
+                    <a:pt x="861299" y="3234157"/>
+                  </a:lnTo>
+                  <a:lnTo>
+                    <a:pt x="932922" y="3283276"/>
+                  </a:lnTo>
+                  <a:lnTo>
+                    <a:pt x="1004544" y="3322728"/>
+                  </a:lnTo>
+                  <a:lnTo>
+                    <a:pt x="1076167" y="3354416"/>
+                  </a:lnTo>
+                  <a:lnTo>
+                    <a:pt x="1147789" y="3379868"/>
+                  </a:lnTo>
+                  <a:lnTo>
+                    <a:pt x="1219412" y="3400312"/>
+                  </a:lnTo>
+                  <a:lnTo>
+                    <a:pt x="1291034" y="3416731"/>
+                  </a:lnTo>
+                  <a:lnTo>
+                    <a:pt x="1362657" y="3429920"/>
+                  </a:lnTo>
+                  <a:lnTo>
+                    <a:pt x="1434280" y="3440513"/>
+                  </a:lnTo>
+                  <a:lnTo>
+                    <a:pt x="1505902" y="3449021"/>
+                  </a:lnTo>
+                  <a:lnTo>
+                    <a:pt x="1577525" y="3455855"/>
+                  </a:lnTo>
+                  <a:lnTo>
+                    <a:pt x="1649147" y="3461344"/>
+                  </a:lnTo>
+                  <a:lnTo>
+                    <a:pt x="1720770" y="3465753"/>
+                  </a:lnTo>
+                  <a:lnTo>
+                    <a:pt x="1792392" y="3469294"/>
+                  </a:lnTo>
+                  <a:lnTo>
+                    <a:pt x="1864015" y="3472138"/>
+                  </a:lnTo>
+                  <a:lnTo>
+                    <a:pt x="1935637" y="3474423"/>
+                  </a:lnTo>
+                  <a:lnTo>
+                    <a:pt x="2007260" y="3476258"/>
+                  </a:lnTo>
+                  <a:lnTo>
+                    <a:pt x="2078882" y="3477731"/>
+                  </a:lnTo>
+                  <a:lnTo>
+                    <a:pt x="2150505" y="3478915"/>
+                  </a:lnTo>
+                  <a:lnTo>
+                    <a:pt x="2222127" y="3479866"/>
+                  </a:lnTo>
+                  <a:lnTo>
+                    <a:pt x="2293750" y="3480630"/>
+                  </a:lnTo>
+                  <a:lnTo>
+                    <a:pt x="2365372" y="3481243"/>
+                  </a:lnTo>
+                  <a:lnTo>
+                    <a:pt x="2436995" y="3481736"/>
+                  </a:lnTo>
+                  <a:lnTo>
+                    <a:pt x="2508617" y="3482131"/>
+                  </a:lnTo>
+                  <a:lnTo>
+                    <a:pt x="2580240" y="3482449"/>
+                  </a:lnTo>
+                  <a:lnTo>
+                    <a:pt x="2651862" y="3482704"/>
+                  </a:lnTo>
+                  <a:lnTo>
+                    <a:pt x="2723485" y="3482910"/>
+                  </a:lnTo>
+                  <a:lnTo>
+                    <a:pt x="2795108" y="3483074"/>
+                  </a:lnTo>
+                  <a:lnTo>
+                    <a:pt x="2866730" y="3483207"/>
+                  </a:lnTo>
+                  <a:lnTo>
+                    <a:pt x="2938353" y="3483313"/>
                   </a:lnTo>
                 </a:path>
               </a:pathLst>
@@ -4200,7 +4299,7 @@
           </p:nvSpPr>
           <p:spPr>
             <a:xfrm>
-              <a:off x="5783789" y="2073503"/>
+              <a:off x="5793129" y="2073503"/>
               <a:ext cx="0" cy="3649639"/>
             </a:xfrm>
             <a:custGeom>
@@ -4243,7 +4342,7 @@
           </p:nvSpPr>
           <p:spPr>
             <a:xfrm>
-              <a:off x="4658599" y="2073503"/>
+              <a:off x="4667548" y="2073503"/>
               <a:ext cx="0" cy="3649639"/>
             </a:xfrm>
             <a:custGeom>
@@ -4286,7 +4385,7 @@
           </p:nvSpPr>
           <p:spPr>
             <a:xfrm>
-              <a:off x="6864197" y="2073503"/>
+              <a:off x="6868063" y="2073503"/>
               <a:ext cx="0" cy="3649639"/>
             </a:xfrm>
             <a:custGeom>
@@ -4559,7 +4658,7 @@
           </p:nvSpPr>
           <p:spPr>
             <a:xfrm>
-              <a:off x="3120823" y="5785772"/>
+              <a:off x="3120990" y="5785772"/>
               <a:ext cx="161574" cy="80101"/>
             </a:xfrm>
             <a:prstGeom prst="rect">
@@ -4605,7 +4704,7 @@
           </p:nvSpPr>
           <p:spPr>
             <a:xfrm>
-              <a:off x="5688698" y="5785772"/>
+              <a:off x="5688107" y="5785772"/>
               <a:ext cx="62179" cy="80101"/>
             </a:xfrm>
             <a:prstGeom prst="rect">
@@ -4651,7 +4750,7 @@
           </p:nvSpPr>
           <p:spPr>
             <a:xfrm>
-              <a:off x="8175787" y="5785772"/>
+              <a:off x="8174437" y="5785772"/>
               <a:ext cx="124358" cy="80101"/>
             </a:xfrm>
             <a:prstGeom prst="rect">
@@ -4790,7 +4889,7 @@
           <p:spPr>
             <a:xfrm>
               <a:off x="817517" y="1896563"/>
-              <a:ext cx="21710142" cy="82021"/>
+              <a:ext cx="6807433" cy="82021"/>
             </a:xfrm>
             <a:prstGeom prst="rect">
               <a:avLst/>
@@ -4822,7 +4921,7 @@
                   <a:latin typeface="Helvetica"/>
                   <a:cs typeface="Helvetica"/>
                 </a:rPr>
-                <a:t>HR per 10 mL/min decline: 18.04 (0.00-764213725138869525833694229515796579006687350761331076407713964144077572455493883622962408575770609104542888793693958055774236794762321213837395806274328291089414169523669433838787619856706193575132369601248843804970975229689844465664.00), p_Bonf = 1.000 (n = 6)  |  per IQR decline (Δ = 21.9): 563.30 (0.00-Inf)  |  IQR: [-10.5, 11.4]</a:t>
+                <a:t>HR per 10 mL/min decline: 21.78 (0.00-Inf), p_Bonf = 1.000 (n = 6)  |  per IQR decline (Δ = 21.9): 839.77 (0.00-Inf)  |  IQR: [-10.4, 11.4]</a:t>
               </a:r>
             </a:p>
           </p:txBody>
